--- a/cursos/recursos/desequilibrios-de-material/06-pareja-de-alfiles-en-el-final.pptx
+++ b/cursos/recursos/desequilibrios-de-material/06-pareja-de-alfiles-en-el-final.pptx
@@ -3484,7 +3484,7 @@
                 </a:solidFill>
                 <a:latin typeface="Calibri"/>
               </a:rPr>
-              <a:t>Pista: Pensá en mover el caballo de f6 a una casilla donde deje de estorbar el avance central y de paso quite objetivos al alfil rival.</a:t>
+              <a:t>Pista: Piensa en mover el caballo de f6 a una casilla donde deje de estorbar el avance central y de paso quite objetivos al alfil rival.</a:t>
             </a:r>
           </a:p>
         </p:txBody>
@@ -3807,7 +3807,7 @@
                 </a:solidFill>
                 <a:latin typeface="Calibri"/>
               </a:rPr>
-              <a:t>Pista: Pensá en un avance de peón que prepare además ...c7-c5 y ...a7-a5 más adelante.</a:t>
+              <a:t>Pista: Piensa en un avance de peón que prepare además ...c7-c5 y ...a7-a5 más adelante.</a:t>
             </a:r>
           </a:p>
         </p:txBody>
@@ -4130,7 +4130,7 @@
                 </a:solidFill>
                 <a:latin typeface="Calibri"/>
               </a:rPr>
-              <a:t>Pista: Pensá en un avance de peón central natural que refuerce el control sobre las casillas claras y oscuras a la vez.</a:t>
+              <a:t>Pista: Piensa en un avance de peón central natural que refuerce el control sobre las casillas claras y oscuras a la vez.</a:t>
             </a:r>
           </a:p>
         </p:txBody>
@@ -4453,7 +4453,7 @@
                 </a:solidFill>
                 <a:latin typeface="Calibri"/>
               </a:rPr>
-              <a:t>Pista: Pensá en ofrecer el cambio de los alfiles de casillas oscuras que quedan en el tablero.</a:t>
+              <a:t>Pista: Piensa en ofrecer el cambio de los alfiles de casillas oscuras que quedan en el tablero.</a:t>
             </a:r>
           </a:p>
         </p:txBody>
@@ -4997,7 +4997,7 @@
                 </a:solidFill>
                 <a:latin typeface="Calibri"/>
               </a:rPr>
-              <a:t>•  Buscá activamente ganar la pareja de alfiles en el medio juego, incluso con jugadas de caballo poco habituales como 8...Ce7!.</a:t>
+              <a:t>•  Busca activamente ganar la pareja de alfiles en el medio juego, incluso con jugadas de caballo poco habituales como 8...Ce7!.</a:t>
             </a:r>
           </a:p>
           <a:p>
@@ -5013,7 +5013,7 @@
                 </a:solidFill>
                 <a:latin typeface="Calibri"/>
               </a:rPr>
-              <a:t>•  Aplicá la regla del color: colocá tus peones en casillas del color contrario al alfil rival para restringirlo al máximo mientras tus propios alfiles ganan diagonales.</a:t>
+              <a:t>•  Aplica la regla del color: coloca tus peones en casillas del color contrario al alfil rival para restringirlo al máximo mientras tus propios alfiles ganan diagonales.</a:t>
             </a:r>
           </a:p>
           <a:p>
@@ -5631,7 +5631,7 @@
                 </a:solidFill>
                 <a:latin typeface="Calibri"/>
               </a:rPr>
-              <a:t>Pista: Pensá en reubicar el alfil hacia f2, desde donde controla una diagonal larga y prepara una incursión más profunda.</a:t>
+              <a:t>Pista: Piensa en reubicar el alfil hacia f2, desde donde controla una diagonal larga y prepara una incursión más profunda.</a:t>
             </a:r>
           </a:p>
         </p:txBody>
@@ -5954,7 +5954,7 @@
                 </a:solidFill>
                 <a:latin typeface="Calibri"/>
               </a:rPr>
-              <a:t>Pista: Pensá en avanzar el peón f un paso más, abriendo líneas para que los alfiles cooperen de forma decisiva.</a:t>
+              <a:t>Pista: Piensa en avanzar el peón f un paso más, abriendo líneas para que los alfiles cooperen de forma decisiva.</a:t>
             </a:r>
           </a:p>
         </p:txBody>
@@ -6452,7 +6452,7 @@
                 </a:solidFill>
                 <a:latin typeface="Calibri"/>
               </a:rPr>
-              <a:t>Pista: Pensá en un avance de peón en el flanco de dama que ataque directamente la cadena de peones negra en ese sector.</a:t>
+              <a:t>Pista: Piensa en un avance de peón en el flanco de dama que ataque directamente la cadena de peones negra en ese sector.</a:t>
             </a:r>
           </a:p>
         </p:txBody>
@@ -6775,7 +6775,7 @@
                 </a:solidFill>
                 <a:latin typeface="Calibri"/>
               </a:rPr>
-              <a:t>Pista: Pensá en una jugada de torre que prepare capturar en f3 y, de paso, ataque indirectamente al peón débil b5.</a:t>
+              <a:t>Pista: Piensa en una jugada de torre que prepare capturar en f3 y, de paso, ataque indirectamente al peón débil b5.</a:t>
             </a:r>
           </a:p>
         </p:txBody>
@@ -7098,7 +7098,7 @@
                 </a:solidFill>
                 <a:latin typeface="Calibri"/>
               </a:rPr>
-              <a:t>Pista: Pensá en una jugada de alfil que controle la casilla de la que el caballo rival quiere salir.</a:t>
+              <a:t>Pista: Piensa en una jugada de alfil que controle la casilla de la que el caballo rival quiere salir.</a:t>
             </a:r>
           </a:p>
         </p:txBody>
@@ -7421,7 +7421,7 @@
                 </a:solidFill>
                 <a:latin typeface="Calibri"/>
               </a:rPr>
-              <a:t>Pista: Pensá en centralizar aún más al rey blanco antes de definir la captura del peón central negro.</a:t>
+              <a:t>Pista: Piensa en centralizar aún más al rey blanco antes de definir la captura del peón central negro.</a:t>
             </a:r>
           </a:p>
         </p:txBody>
@@ -7658,7 +7658,7 @@
                 </a:solidFill>
                 <a:latin typeface="Calibri"/>
               </a:rPr>
-              <a:t>•  Maniobrá con paciencia y esperá el momento justo para romper la estructura de peones; no toda ruptura temprana ayuda a tus propias piezas.</a:t>
+              <a:t>•  Maniobra con paciencia y esperá el momento justo para romper la estructura de peones; no toda ruptura temprana ayuda a tus propias piezas.</a:t>
             </a:r>
           </a:p>
           <a:p>
@@ -7674,7 +7674,7 @@
                 </a:solidFill>
                 <a:latin typeface="Calibri"/>
               </a:rPr>
-              <a:t>•  Una vez fijada una debilidad en un flanco, buscá crear una segunda debilidad en el flanco opuesto: dos frentes de ataque son mucho más difíciles de defender que uno solo.</a:t>
+              <a:t>•  Una vez fijada una debilidad en un flanco, busca crear una segunda debilidad en el flanco opuesto: dos frentes de ataque son mucho más difíciles de defender que uno solo.</a:t>
             </a:r>
           </a:p>
         </p:txBody>
@@ -8276,7 +8276,7 @@
                 </a:solidFill>
                 <a:latin typeface="Calibri"/>
               </a:rPr>
-              <a:t>Pista: Pensá en un avance de peón que ataque directamente al peón f5 negro, obligándolo a definirse.</a:t>
+              <a:t>Pista: Piensa en un avance de peón que ataque directamente al peón f5 negro, obligándolo a definirse.</a:t>
             </a:r>
           </a:p>
         </p:txBody>
@@ -8599,7 +8599,7 @@
                 </a:solidFill>
                 <a:latin typeface="Calibri"/>
               </a:rPr>
-              <a:t>Pista: Pensá en llevar el alfil a una casilla central desde donde controle diagonales hacia ambos flancos.</a:t>
+              <a:t>Pista: Piensa en llevar el alfil a una casilla central desde donde controle diagonales hacia ambos flancos.</a:t>
             </a:r>
           </a:p>
         </p:txBody>
@@ -8922,7 +8922,7 @@
                 </a:solidFill>
                 <a:latin typeface="Calibri"/>
               </a:rPr>
-              <a:t>Pista: Pensá en una jugada de alfil que ataque directamente al caballo negro mientras prepara el avance de los peones del flanco de dama.</a:t>
+              <a:t>Pista: Piensa en una jugada de alfil que ataque directamente al caballo negro mientras prepara el avance de los peones del flanco de dama.</a:t>
             </a:r>
           </a:p>
         </p:txBody>
@@ -9286,7 +9286,7 @@
                 </a:solidFill>
                 <a:latin typeface="Calibri"/>
               </a:rPr>
-              <a:t>•  La regla del color es una guía general útil, pero no absoluta: evaluá siempre si las debilidades que le creás al rival compensan la limitación que te autoimponés.</a:t>
+              <a:t>•  La regla del color es una guía general útil, pero no absoluta: evalúa siempre si las debilidades que le creas al rival compensan la limitación que te autoimpones.</a:t>
             </a:r>
           </a:p>
           <a:p>
@@ -9302,7 +9302,7 @@
                 </a:solidFill>
                 <a:latin typeface="Calibri"/>
               </a:rPr>
-              <a:t>•  En posiciones abiertas y simétricas, usá tus alfiles para dominar al caballo rival, cortar al rey enemigo de un flanco y crear zugzwangs sucesivos.</a:t>
+              <a:t>•  En posiciones abiertas y simétricas, usa tus alfiles para dominar al caballo rival, cortar al rey enemigo de un flanco y crear zugzwangs sucesivos.</a:t>
             </a:r>
           </a:p>
           <a:p>
@@ -9318,7 +9318,7 @@
                 </a:solidFill>
                 <a:latin typeface="Calibri"/>
               </a:rPr>
-              <a:t>•  Antes de definir una estructura de peones, pensá qué debilidades quedan fijas en el bando rival, no solo en el propio: eso determina si vale la pena la ruptura.</a:t>
+              <a:t>•  Antes de definir una estructura de peones, piensa qué debilidades quedan fijas en el bando rival, no solo en el propio: eso determina si vale la pena la ruptura.</a:t>
             </a:r>
           </a:p>
         </p:txBody>
@@ -9461,7 +9461,7 @@
                 </a:solidFill>
                 <a:latin typeface="Calibri"/>
               </a:rPr>
-              <a:t>Reproducí la partida Englisch–Steinitz y marcá en qué jugada se cumple cada uno de los cuatro planes clásicos. Después jugá contra el motor la posición de Grischuk–Roiz con el bando de la pareja de alfiles, tratando de dominar al caballo rival aunque no puedas aplicar la regla de colocación de color de manera perfecta.</a:t>
+              <a:t>Reproduce la partida Englisch–Steinitz y marca en qué jugada se cumple cada uno de los cuatro planes clásicos. Después juega contra el motor la posición de Grischuk–Roiz con el bando de la pareja de alfiles, tratando de dominar al caballo rival aunque no puedas aplicar la regla de colocación de color de manera perfecta.</a:t>
             </a:r>
           </a:p>
           <a:p>
@@ -9493,7 +9493,7 @@
                 </a:solidFill>
                 <a:latin typeface="Calibri"/>
               </a:rPr>
-              <a:t>En la página del curso podés recorrer cada partida con los comentarios, adivinar las jugadas clave en el tablero y continuar cualquier posición contra el motor (Stockfish). La hoja de ejercicios en PDF reúne los momentos clave de esta lección para resolver sin tablero.</a:t>
+              <a:t>En la página del curso puedes recorrer cada partida con los comentarios, adivinar las jugadas clave en el tablero y continuar cualquier posición contra el motor (Stockfish). La hoja de ejercicios en PDF reúne los momentos clave de esta lección para resolver sin tablero.</a:t>
             </a:r>
           </a:p>
         </p:txBody>
@@ -9532,7 +9532,7 @@
                 </a:solidFill>
                 <a:latin typeface="Calibri"/>
               </a:rPr>
-              <a:t>•  Primero recorré la partida completa leyendo los comentarios.</a:t>
+              <a:t>•  Primero recorre la partida completa leyendo los comentarios.</a:t>
             </a:r>
           </a:p>
           <a:p>
@@ -9548,7 +9548,7 @@
                 </a:solidFill>
                 <a:latin typeface="Calibri"/>
               </a:rPr>
-              <a:t>•  Después hacé el modo "adivinar las jugadas clave" hasta acertar todas.</a:t>
+              <a:t>•  Después haz el modo "adivinar las jugadas clave" hasta acertar todas.</a:t>
             </a:r>
           </a:p>
           <a:p>
@@ -9564,7 +9564,7 @@
                 </a:solidFill>
                 <a:latin typeface="Calibri"/>
               </a:rPr>
-              <a:t>•  Por último respondé el cuestionario y anotá con tus palabras las reglas de la lección.</a:t>
+              <a:t>•  Por último responde el cuestionario y anota con tus palabras las reglas de la lección.</a:t>
             </a:r>
           </a:p>
         </p:txBody>
@@ -10152,7 +10152,7 @@
                 </a:solidFill>
                 <a:latin typeface="Calibri"/>
               </a:rPr>
-              <a:t>•  Colocá tus peones en el color del alfil (o de las piezas) rival para restringirlo al máximo.</a:t>
+              <a:t>•  Coloca tus peones en el color del alfil (o de las piezas) rival para restringirlo al máximo.</a:t>
             </a:r>
           </a:p>
           <a:p>
@@ -10168,7 +10168,7 @@
                 </a:solidFill>
                 <a:latin typeface="Calibri"/>
               </a:rPr>
-              <a:t>•  Ganá espacio en los dos flancos a la vez: es la manera más eficaz de aprovechar la pareja de alfiles.</a:t>
+              <a:t>•  Gana espacio en los dos flancos a la vez: es la manera más eficaz de aprovechar la pareja de alfiles.</a:t>
             </a:r>
           </a:p>
           <a:p>
@@ -10184,7 +10184,7 @@
                 </a:solidFill>
                 <a:latin typeface="Calibri"/>
               </a:rPr>
-              <a:t>•  Centralizá el rey sin temor: con la pareja de alfiles es difícil que el rival lo hostigue.</a:t>
+              <a:t>•  Centraliza el rey sin temor: con la pareja de alfiles es difícil que el rival lo hostigue.</a:t>
             </a:r>
           </a:p>
           <a:p>
@@ -10200,7 +10200,7 @@
                 </a:solidFill>
                 <a:latin typeface="Calibri"/>
               </a:rPr>
-              <a:t>•  Cambiá un alfil en el momento justo si eso te deja con un final de alfil contra caballo ganador.</a:t>
+              <a:t>•  Cambia un alfil en el momento justo si eso te deja con un final de alfil contra caballo ganador.</a:t>
             </a:r>
           </a:p>
           <a:p>
@@ -10414,7 +10414,7 @@
                 </a:solidFill>
                 <a:latin typeface="Calibri"/>
               </a:rPr>
-              <a:t>•  La 'regla del color': colocá tus peones en casillas del color contrario al alfil rival. Así restringís al máximo el alcance de esa pieza mientras tus propios alfiles ganan diagonales libres.</a:t>
+              <a:t>•  La 'regla del color': coloca tus peones en casillas del color contrario al alfil rival. Así restringes al máximo el alcance de esa pieza mientras tus propios alfiles ganan diagonales libres.</a:t>
             </a:r>
           </a:p>
           <a:p>
